--- a/Quadro_Aulas_Report_2026-07-01.pptx
+++ b/Quadro_Aulas_Report_2026-07-01.pptx
@@ -1038,7 +1038,7 @@
                   <a:srgbClr val="8FA3C0"/>
                 </a:solidFill>
               </a:rPr>
-              <a:t>1 de Julho de 2026 as 08:40</a:t>
+              <a:t>1 de Julho de 2026 as 19:33</a:t>
             </a:r>
             <a:endParaRPr lang="en-US" sz="700" dirty="0"/>
           </a:p>
@@ -5300,7 +5300,7 @@
                   <a:srgbClr val="DC2626"/>
                 </a:solidFill>
               </a:rPr>
-              <a:t>34</a:t>
+              <a:t>33</a:t>
             </a:r>
             <a:endParaRPr lang="en-US" sz="2200" dirty="0"/>
           </a:p>
@@ -5372,7 +5372,7 @@
                   <a:srgbClr val="888888"/>
                 </a:solidFill>
               </a:rPr>
-              <a:t>fixes sem card no Git · 47% do time com card</a:t>
+              <a:t>fixes sem card no Git · 48% do time com card</a:t>
             </a:r>
             <a:endParaRPr lang="en-US" sz="700" dirty="0"/>
           </a:p>
@@ -8013,7 +8013,7 @@
                   <a:srgbClr val="DC2626"/>
                 </a:solidFill>
               </a:rPr>
-              <a:t>⚠ 5 fix(s) sem card</a:t>
+              <a:t>⚠ 4 fix(s) sem card</a:t>
             </a:r>
             <a:endParaRPr lang="en-US" sz="750" dirty="0"/>
           </a:p>
